--- a/Labs/Lab5/presentation.pptx
+++ b/Labs/Lab5/presentation.pptx
@@ -5,10 +5,10 @@
     <p:sldMasterId id="2147483648" r:id="rId1"/>
   </p:sldMasterIdLst>
   <p:notesMasterIdLst>
-    <p:notesMasterId r:id="rId14"/>
+    <p:notesMasterId r:id="rId13"/>
   </p:notesMasterIdLst>
   <p:handoutMasterIdLst>
-    <p:handoutMasterId r:id="rId15"/>
+    <p:handoutMasterId r:id="rId14"/>
   </p:handoutMasterIdLst>
   <p:sldIdLst>
     <p:sldId id="256" r:id="rId3"/>
@@ -17,11 +17,10 @@
     <p:sldId id="271" r:id="rId6"/>
     <p:sldId id="258" r:id="rId7"/>
     <p:sldId id="272" r:id="rId8"/>
-    <p:sldId id="274" r:id="rId9"/>
-    <p:sldId id="275" r:id="rId10"/>
-    <p:sldId id="276" r:id="rId11"/>
-    <p:sldId id="278" r:id="rId12"/>
-    <p:sldId id="277" r:id="rId13"/>
+    <p:sldId id="275" r:id="rId9"/>
+    <p:sldId id="276" r:id="rId10"/>
+    <p:sldId id="278" r:id="rId11"/>
+    <p:sldId id="277" r:id="rId12"/>
   </p:sldIdLst>
   <p:sldSz cx="12192000" cy="6858000"/>
   <p:notesSz cx="7103745" cy="10234295"/>
@@ -3790,78 +3789,6 @@
         </p:nvSpPr>
         <p:spPr/>
         <p:txBody>
-          <a:bodyPr>
-            <a:normAutofit/>
-          </a:bodyPr>
-          <a:p>
-            <a:r>
-              <a:rPr lang="ru-RU"/>
-              <a:t>Точечный график случайных данных</a:t>
-            </a:r>
-            <a:endParaRPr lang="ru-RU"/>
-          </a:p>
-        </p:txBody>
-      </p:sp>
-      <p:pic>
-        <p:nvPicPr>
-          <p:cNvPr id="7" name="Изображение 7"/>
-          <p:cNvPicPr>
-            <a:picLocks noChangeAspect="1"/>
-          </p:cNvPicPr>
-          <p:nvPr>
-            <p:ph idx="1"/>
-          </p:nvPr>
-        </p:nvPicPr>
-        <p:blipFill>
-          <a:blip r:embed="rId1"/>
-          <a:stretch>
-            <a:fillRect/>
-          </a:stretch>
-        </p:blipFill>
-        <p:spPr>
-          <a:xfrm>
-            <a:off x="2677795" y="1825625"/>
-            <a:ext cx="6454140" cy="4351655"/>
-          </a:xfrm>
-          <a:prstGeom prst="rect">
-            <a:avLst/>
-          </a:prstGeom>
-          <a:noFill/>
-          <a:ln>
-            <a:noFill/>
-          </a:ln>
-        </p:spPr>
-      </p:pic>
-    </p:spTree>
-  </p:cSld>
-  <p:clrMapOvr>
-    <a:masterClrMapping/>
-  </p:clrMapOvr>
-</p:sld>
-</file>
-
-<file path=ppt/slides/slide11.xml><?xml version="1.0" encoding="utf-8"?>
-<p:sld xmlns:a="http://schemas.openxmlformats.org/drawingml/2006/main" xmlns:r="http://schemas.openxmlformats.org/officeDocument/2006/relationships" xmlns:p="http://schemas.openxmlformats.org/presentationml/2006/main">
-  <p:cSld>
-    <p:spTree>
-      <p:nvGrpSpPr>
-        <p:cNvPr id="1" name=""/>
-        <p:cNvGrpSpPr/>
-        <p:nvPr/>
-      </p:nvGrpSpPr>
-      <p:grpSpPr/>
-      <p:sp>
-        <p:nvSpPr>
-          <p:cNvPr id="2" name="Заголовок 1"/>
-          <p:cNvSpPr>
-            <a:spLocks noGrp="1"/>
-          </p:cNvSpPr>
-          <p:nvPr>
-            <p:ph type="title"/>
-          </p:nvPr>
-        </p:nvSpPr>
-        <p:spPr/>
-        <p:txBody>
           <a:bodyPr/>
           <a:p>
             <a:r>
@@ -4370,76 +4297,6 @@
         </p:nvSpPr>
         <p:spPr/>
         <p:txBody>
-          <a:bodyPr/>
-          <a:p>
-            <a:r>
-              <a:rPr lang="ru-RU" altLang="ru-RU"/>
-              <a:t>Решение СЛАУ</a:t>
-            </a:r>
-            <a:endParaRPr lang="ru-RU" altLang="ru-RU"/>
-          </a:p>
-        </p:txBody>
-      </p:sp>
-      <p:pic>
-        <p:nvPicPr>
-          <p:cNvPr id="6" name="Изображение 7"/>
-          <p:cNvPicPr>
-            <a:picLocks noChangeAspect="1"/>
-          </p:cNvPicPr>
-          <p:nvPr>
-            <p:ph idx="1"/>
-          </p:nvPr>
-        </p:nvPicPr>
-        <p:blipFill>
-          <a:blip r:embed="rId1"/>
-          <a:stretch>
-            <a:fillRect/>
-          </a:stretch>
-        </p:blipFill>
-        <p:spPr>
-          <a:xfrm>
-            <a:off x="3862070" y="2738755"/>
-            <a:ext cx="4086225" cy="2524125"/>
-          </a:xfrm>
-          <a:prstGeom prst="rect">
-            <a:avLst/>
-          </a:prstGeom>
-          <a:noFill/>
-          <a:ln>
-            <a:noFill/>
-          </a:ln>
-        </p:spPr>
-      </p:pic>
-    </p:spTree>
-  </p:cSld>
-  <p:clrMapOvr>
-    <a:masterClrMapping/>
-  </p:clrMapOvr>
-</p:sld>
-</file>
-
-<file path=ppt/slides/slide8.xml><?xml version="1.0" encoding="utf-8"?>
-<p:sld xmlns:a="http://schemas.openxmlformats.org/drawingml/2006/main" xmlns:r="http://schemas.openxmlformats.org/officeDocument/2006/relationships" xmlns:p="http://schemas.openxmlformats.org/presentationml/2006/main">
-  <p:cSld>
-    <p:spTree>
-      <p:nvGrpSpPr>
-        <p:cNvPr id="1" name=""/>
-        <p:cNvGrpSpPr/>
-        <p:nvPr/>
-      </p:nvGrpSpPr>
-      <p:grpSpPr/>
-      <p:sp>
-        <p:nvSpPr>
-          <p:cNvPr id="2" name="Заголовок 1"/>
-          <p:cNvSpPr>
-            <a:spLocks noGrp="1"/>
-          </p:cNvSpPr>
-          <p:nvPr>
-            <p:ph type="title"/>
-          </p:nvPr>
-        </p:nvSpPr>
-        <p:spPr/>
-        <p:txBody>
           <a:bodyPr>
             <a:normAutofit fontScale="90000"/>
           </a:bodyPr>
@@ -4514,7 +4371,7 @@
 </p:sld>
 </file>
 
-<file path=ppt/slides/slide9.xml><?xml version="1.0" encoding="utf-8"?>
+<file path=ppt/slides/slide8.xml><?xml version="1.0" encoding="utf-8"?>
 <p:sld xmlns:a="http://schemas.openxmlformats.org/drawingml/2006/main" xmlns:r="http://schemas.openxmlformats.org/officeDocument/2006/relationships" xmlns:p="http://schemas.openxmlformats.org/presentationml/2006/main">
   <p:cSld>
     <p:spTree>
@@ -4596,6 +4453,78 @@
           <a:xfrm>
             <a:off x="2719705" y="1825625"/>
             <a:ext cx="6370320" cy="4351655"/>
+          </a:xfrm>
+          <a:prstGeom prst="rect">
+            <a:avLst/>
+          </a:prstGeom>
+          <a:noFill/>
+          <a:ln>
+            <a:noFill/>
+          </a:ln>
+        </p:spPr>
+      </p:pic>
+    </p:spTree>
+  </p:cSld>
+  <p:clrMapOvr>
+    <a:masterClrMapping/>
+  </p:clrMapOvr>
+</p:sld>
+</file>
+
+<file path=ppt/slides/slide9.xml><?xml version="1.0" encoding="utf-8"?>
+<p:sld xmlns:a="http://schemas.openxmlformats.org/drawingml/2006/main" xmlns:r="http://schemas.openxmlformats.org/officeDocument/2006/relationships" xmlns:p="http://schemas.openxmlformats.org/presentationml/2006/main">
+  <p:cSld>
+    <p:spTree>
+      <p:nvGrpSpPr>
+        <p:cNvPr id="1" name=""/>
+        <p:cNvGrpSpPr/>
+        <p:nvPr/>
+      </p:nvGrpSpPr>
+      <p:grpSpPr/>
+      <p:sp>
+        <p:nvSpPr>
+          <p:cNvPr id="2" name="Заголовок 1"/>
+          <p:cNvSpPr>
+            <a:spLocks noGrp="1"/>
+          </p:cNvSpPr>
+          <p:nvPr>
+            <p:ph type="title"/>
+          </p:nvPr>
+        </p:nvSpPr>
+        <p:spPr/>
+        <p:txBody>
+          <a:bodyPr>
+            <a:normAutofit/>
+          </a:bodyPr>
+          <a:p>
+            <a:r>
+              <a:rPr lang="ru-RU"/>
+              <a:t>Точечный график случайных данных</a:t>
+            </a:r>
+            <a:endParaRPr lang="ru-RU"/>
+          </a:p>
+        </p:txBody>
+      </p:sp>
+      <p:pic>
+        <p:nvPicPr>
+          <p:cNvPr id="7" name="Изображение 7"/>
+          <p:cNvPicPr>
+            <a:picLocks noChangeAspect="1"/>
+          </p:cNvPicPr>
+          <p:nvPr>
+            <p:ph idx="1"/>
+          </p:nvPr>
+        </p:nvPicPr>
+        <p:blipFill>
+          <a:blip r:embed="rId1"/>
+          <a:stretch>
+            <a:fillRect/>
+          </a:stretch>
+        </p:blipFill>
+        <p:spPr>
+          <a:xfrm>
+            <a:off x="2677795" y="1825625"/>
+            <a:ext cx="6454140" cy="4351655"/>
           </a:xfrm>
           <a:prstGeom prst="rect">
             <a:avLst/>
